--- a/docs/Chain_of_Truth_Deck.pptx
+++ b/docs/Chain_of_Truth_Deck.pptx
@@ -4273,7 +4273,7 @@
                 </a:solidFill>
                 <a:latin typeface="Bahnschrift SemiBold"/>
               </a:rPr>
-              <a:t>AI Builders Hackathon 2026  ·  Team: Lisa Mehta  ·  Source: github.com/lisamehta0791/AI-Truth-Chain  ·  Demo video: (add link)</a:t>
+              <a:t>AI Builders Hackathon 2026  ·  Team: Lisa Mehta  ·  Source: github.com/lisamehta0791/AI-Truth-Chain  ·  Demo video: youtu.be/w0_ygtt7hr0</a:t>
             </a:r>
           </a:p>
         </p:txBody>
